--- a/smoke_samples/family4_stock_combo.pptx
+++ b/smoke_samples/family4_stock_combo.pptx
@@ -145,6 +145,9 @@
             </c:numLit>
           </c:val>
         </c:ser>
+        <c:hiLowLines>
+          <c:spPr/>
+        </c:hiLowLines>
         <c:axId val="48650112"/>
         <c:axId val="48672768"/>
       </c:stockChart>
@@ -353,6 +356,18 @@
             </c:numLit>
           </c:val>
         </c:ser>
+        <c:hiLowLines>
+          <c:spPr/>
+        </c:hiLowLines>
+        <c:upDownBars>
+          <c:gapWidth val="150"/>
+          <c:upBars>
+            <c:spPr/>
+          </c:upBars>
+          <c:downBars>
+            <c:spPr/>
+          </c:downBars>
+        </c:upDownBars>
         <c:axId val="48650112"/>
         <c:axId val="48672768"/>
       </c:stockChart>

--- a/smoke_samples/family4_stock_combo.pptx
+++ b/smoke_samples/family4_stock_combo.pptx
@@ -145,9 +145,7 @@
             </c:numLit>
           </c:val>
         </c:ser>
-        <c:hiLowLines>
-          <c:spPr/>
-        </c:hiLowLines>
+        <c:hiLowLines/>
         <c:axId val="48650112"/>
         <c:axId val="48672768"/>
       </c:stockChart>
@@ -356,17 +354,11 @@
             </c:numLit>
           </c:val>
         </c:ser>
-        <c:hiLowLines>
-          <c:spPr/>
-        </c:hiLowLines>
+        <c:hiLowLines/>
         <c:upDownBars>
           <c:gapWidth val="150"/>
-          <c:upBars>
-            <c:spPr/>
-          </c:upBars>
-          <c:downBars>
-            <c:spPr/>
-          </c:downBars>
+          <c:upBars/>
+          <c:downBars/>
         </c:upDownBars>
         <c:axId val="48650112"/>
         <c:axId val="48672768"/>
@@ -553,8 +545,133 @@
 </file>
 
 <file path=ppt/slideLayouts/slideLayout1.xml><?xml version="1.0" encoding="utf-8"?>
-<p:sldLayout xmlns:a="http://schemas.openxmlformats.org/drawingml/2006/main" xmlns:r="http://schemas.openxmlformats.org/officeDocument/2006/relationships" xmlns:p="http://schemas.openxmlformats.org/presentationml/2006/main" type="blank" preserve="1">
+<p:sldLayout xmlns:a="http://schemas.openxmlformats.org/drawingml/2006/main" xmlns:r="http://schemas.openxmlformats.org/officeDocument/2006/relationships" xmlns:p="http://schemas.openxmlformats.org/presentationml/2006/main" preserve="1">
+  <p:cSld name="Title and Content">
+    <p:spTree>
+      <p:nvGrpSpPr>
+        <p:cNvPr id="1" name=""/>
+        <p:cNvGrpSpPr/>
+        <p:nvPr/>
+      </p:nvGrpSpPr>
+      <p:grpSpPr>
+        <a:xfrm>
+          <a:off x="0" y="0"/>
+          <a:ext cx="0" cy="0"/>
+          <a:chOff x="0" y="0"/>
+          <a:chExt cx="0" cy="0"/>
+        </a:xfrm>
+      </p:grpSpPr>
+    </p:spTree>
+  </p:cSld>
+  <p:clrMapOvr>
+    <a:masterClrMapping/>
+  </p:clrMapOvr>
+</p:sldLayout>
+</file>
+
+<file path=ppt/slideLayouts/slideLayout2.xml><?xml version="1.0" encoding="utf-8"?>
+<p:sldLayout xmlns:a="http://schemas.openxmlformats.org/drawingml/2006/main" xmlns:r="http://schemas.openxmlformats.org/officeDocument/2006/relationships" xmlns:p="http://schemas.openxmlformats.org/presentationml/2006/main" preserve="1">
+  <p:cSld name="Title Only">
+    <p:spTree>
+      <p:nvGrpSpPr>
+        <p:cNvPr id="1" name=""/>
+        <p:cNvGrpSpPr/>
+        <p:nvPr/>
+      </p:nvGrpSpPr>
+      <p:grpSpPr>
+        <a:xfrm>
+          <a:off x="0" y="0"/>
+          <a:ext cx="0" cy="0"/>
+          <a:chOff x="0" y="0"/>
+          <a:chExt cx="0" cy="0"/>
+        </a:xfrm>
+      </p:grpSpPr>
+    </p:spTree>
+  </p:cSld>
+  <p:clrMapOvr>
+    <a:masterClrMapping/>
+  </p:clrMapOvr>
+</p:sldLayout>
+</file>
+
+<file path=ppt/slideLayouts/slideLayout3.xml><?xml version="1.0" encoding="utf-8"?>
+<p:sldLayout xmlns:a="http://schemas.openxmlformats.org/drawingml/2006/main" xmlns:r="http://schemas.openxmlformats.org/officeDocument/2006/relationships" xmlns:p="http://schemas.openxmlformats.org/presentationml/2006/main" preserve="1">
   <p:cSld name="Blank">
+    <p:spTree>
+      <p:nvGrpSpPr>
+        <p:cNvPr id="1" name=""/>
+        <p:cNvGrpSpPr/>
+        <p:nvPr/>
+      </p:nvGrpSpPr>
+      <p:grpSpPr>
+        <a:xfrm>
+          <a:off x="0" y="0"/>
+          <a:ext cx="0" cy="0"/>
+          <a:chOff x="0" y="0"/>
+          <a:chExt cx="0" cy="0"/>
+        </a:xfrm>
+      </p:grpSpPr>
+    </p:spTree>
+  </p:cSld>
+  <p:clrMapOvr>
+    <a:masterClrMapping/>
+  </p:clrMapOvr>
+</p:sldLayout>
+</file>
+
+<file path=ppt/slideLayouts/slideLayout4.xml><?xml version="1.0" encoding="utf-8"?>
+<p:sldLayout xmlns:a="http://schemas.openxmlformats.org/drawingml/2006/main" xmlns:r="http://schemas.openxmlformats.org/officeDocument/2006/relationships" xmlns:p="http://schemas.openxmlformats.org/presentationml/2006/main" preserve="1">
+  <p:cSld name="Centered Title">
+    <p:spTree>
+      <p:nvGrpSpPr>
+        <p:cNvPr id="1" name=""/>
+        <p:cNvGrpSpPr/>
+        <p:nvPr/>
+      </p:nvGrpSpPr>
+      <p:grpSpPr>
+        <a:xfrm>
+          <a:off x="0" y="0"/>
+          <a:ext cx="0" cy="0"/>
+          <a:chOff x="0" y="0"/>
+          <a:chExt cx="0" cy="0"/>
+        </a:xfrm>
+      </p:grpSpPr>
+    </p:spTree>
+  </p:cSld>
+  <p:clrMapOvr>
+    <a:masterClrMapping/>
+  </p:clrMapOvr>
+</p:sldLayout>
+</file>
+
+<file path=ppt/slideLayouts/slideLayout5.xml><?xml version="1.0" encoding="utf-8"?>
+<p:sldLayout xmlns:a="http://schemas.openxmlformats.org/drawingml/2006/main" xmlns:r="http://schemas.openxmlformats.org/officeDocument/2006/relationships" xmlns:p="http://schemas.openxmlformats.org/presentationml/2006/main" preserve="1">
+  <p:cSld name="Title and Big Content">
+    <p:spTree>
+      <p:nvGrpSpPr>
+        <p:cNvPr id="1" name=""/>
+        <p:cNvGrpSpPr/>
+        <p:nvPr/>
+      </p:nvGrpSpPr>
+      <p:grpSpPr>
+        <a:xfrm>
+          <a:off x="0" y="0"/>
+          <a:ext cx="0" cy="0"/>
+          <a:chOff x="0" y="0"/>
+          <a:chExt cx="0" cy="0"/>
+        </a:xfrm>
+      </p:grpSpPr>
+    </p:spTree>
+  </p:cSld>
+  <p:clrMapOvr>
+    <a:masterClrMapping/>
+  </p:clrMapOvr>
+</p:sldLayout>
+</file>
+
+<file path=ppt/slideLayouts/slideLayout6.xml><?xml version="1.0" encoding="utf-8"?>
+<p:sldLayout xmlns:a="http://schemas.openxmlformats.org/drawingml/2006/main" xmlns:r="http://schemas.openxmlformats.org/officeDocument/2006/relationships" xmlns:p="http://schemas.openxmlformats.org/presentationml/2006/main" preserve="1">
+  <p:cSld name="Two Column">
     <p:spTree>
       <p:nvGrpSpPr>
         <p:cNvPr id="1" name=""/>
@@ -604,6 +721,11 @@
   <p:clrMap bg1="lt1" tx1="dk1" bg2="lt2" tx2="dk2" accent1="accent1" accent2="accent2" accent3="accent3" accent4="accent4" accent5="accent5" accent6="accent6" hlink="hlink" folHlink="folHlink"/>
   <p:sldLayoutIdLst>
     <p:sldLayoutId id="2147483649" r:id="rId1"/>
+    <p:sldLayoutId id="2147483650" r:id="rId2"/>
+    <p:sldLayoutId id="2147483651" r:id="rId3"/>
+    <p:sldLayoutId id="2147483652" r:id="rId4"/>
+    <p:sldLayoutId id="2147483653" r:id="rId5"/>
+    <p:sldLayoutId id="2147483654" r:id="rId6"/>
   </p:sldLayoutIdLst>
 </p:sldMaster>
 </file>
@@ -888,9 +1010,70 @@
         <a:solidFill>
           <a:schemeClr val="phClr"/>
         </a:solidFill>
+        <a:gradFill rotWithShape="1">
+          <a:gsLst>
+            <a:gs pos="0">
+              <a:schemeClr val="phClr">
+                <a:tint val="50000"/>
+                <a:satMod val="300000"/>
+              </a:schemeClr>
+            </a:gs>
+            <a:gs pos="35000">
+              <a:schemeClr val="phClr">
+                <a:tint val="37000"/>
+                <a:satMod val="300000"/>
+              </a:schemeClr>
+            </a:gs>
+            <a:gs pos="100000">
+              <a:schemeClr val="phClr">
+                <a:tint val="15000"/>
+                <a:satMod val="350000"/>
+              </a:schemeClr>
+            </a:gs>
+          </a:gsLst>
+          <a:lin ang="16200000" scaled="1"/>
+        </a:gradFill>
+        <a:gradFill rotWithShape="1">
+          <a:gsLst>
+            <a:gs pos="0">
+              <a:schemeClr val="phClr">
+                <a:shade val="51000"/>
+                <a:satMod val="130000"/>
+              </a:schemeClr>
+            </a:gs>
+            <a:gs pos="80000">
+              <a:schemeClr val="phClr">
+                <a:shade val="93000"/>
+                <a:satMod val="130000"/>
+              </a:schemeClr>
+            </a:gs>
+            <a:gs pos="100000">
+              <a:schemeClr val="phClr">
+                <a:shade val="94000"/>
+                <a:satMod val="135000"/>
+              </a:schemeClr>
+            </a:gs>
+          </a:gsLst>
+          <a:lin ang="16200000" scaled="0"/>
+        </a:gradFill>
       </a:fillStyleLst>
       <a:lnStyleLst>
         <a:ln w="9525" cap="flat" cmpd="sng" algn="ctr">
+          <a:solidFill>
+            <a:schemeClr val="phClr">
+              <a:shade val="95000"/>
+              <a:satMod val="105000"/>
+            </a:schemeClr>
+          </a:solidFill>
+          <a:prstDash val="solid"/>
+        </a:ln>
+        <a:ln w="25400" cap="flat" cmpd="sng" algn="ctr">
+          <a:solidFill>
+            <a:schemeClr val="phClr"/>
+          </a:solidFill>
+          <a:prstDash val="solid"/>
+        </a:ln>
+        <a:ln w="38100" cap="flat" cmpd="sng" algn="ctr">
           <a:solidFill>
             <a:schemeClr val="phClr"/>
           </a:solidFill>
@@ -901,11 +1084,62 @@
         <a:effectStyle>
           <a:effectLst/>
         </a:effectStyle>
+        <a:effectStyle>
+          <a:effectLst/>
+        </a:effectStyle>
+        <a:effectStyle>
+          <a:effectLst/>
+        </a:effectStyle>
       </a:effectStyleLst>
       <a:bgFillStyleLst>
         <a:solidFill>
           <a:schemeClr val="phClr"/>
         </a:solidFill>
+        <a:gradFill rotWithShape="1">
+          <a:gsLst>
+            <a:gs pos="0">
+              <a:schemeClr val="phClr">
+                <a:tint val="40000"/>
+                <a:satMod val="350000"/>
+              </a:schemeClr>
+            </a:gs>
+            <a:gs pos="40000">
+              <a:schemeClr val="phClr">
+                <a:tint val="45000"/>
+                <a:shade val="99000"/>
+                <a:satMod val="350000"/>
+              </a:schemeClr>
+            </a:gs>
+            <a:gs pos="100000">
+              <a:schemeClr val="phClr">
+                <a:shade val="20000"/>
+                <a:satMod val="255000"/>
+              </a:schemeClr>
+            </a:gs>
+          </a:gsLst>
+          <a:path path="circle">
+            <a:fillToRect l="50000" t="-80000" r="50000" b="180000"/>
+          </a:path>
+        </a:gradFill>
+        <a:gradFill rotWithShape="1">
+          <a:gsLst>
+            <a:gs pos="0">
+              <a:schemeClr val="phClr">
+                <a:tint val="80000"/>
+                <a:satMod val="300000"/>
+              </a:schemeClr>
+            </a:gs>
+            <a:gs pos="100000">
+              <a:schemeClr val="phClr">
+                <a:shade val="30000"/>
+                <a:satMod val="200000"/>
+              </a:schemeClr>
+            </a:gs>
+          </a:gsLst>
+          <a:path path="circle">
+            <a:fillToRect l="50000" t="50000" r="50000" b="50000"/>
+          </a:path>
+        </a:gradFill>
       </a:bgFillStyleLst>
     </a:fmtScheme>
   </a:themeElements>

--- a/smoke_samples/family4_stock_combo.pptx
+++ b/smoke_samples/family4_stock_combo.pptx
@@ -761,7 +761,7 @@
         <p:spPr>
           <a:xfrm>
             <a:off x="457200" y="274638"/>
-            <a:ext cx="8230200" cy="1143000"/>
+            <a:ext cx="8229600" cy="1143000"/>
           </a:xfrm>
           <a:prstGeom prst="rect">
             <a:avLst/>
@@ -774,7 +774,7 @@
           <a:p>
             <a:pPr algn="l"/>
             <a:r>
-              <a:rPr lang="en-US" sz="4400" b="1" i="0" dirty="0"/>
+              <a:rPr lang="en-US" sz="4400" b="0" i="0" u="none" dirty="0"/>
               <a:t>Stock HLC</a:t>
             </a:r>
           </a:p>
@@ -835,7 +835,7 @@
         <p:spPr>
           <a:xfrm>
             <a:off x="457200" y="274638"/>
-            <a:ext cx="8230200" cy="1143000"/>
+            <a:ext cx="8229600" cy="1143000"/>
           </a:xfrm>
           <a:prstGeom prst="rect">
             <a:avLst/>
@@ -848,7 +848,7 @@
           <a:p>
             <a:pPr algn="l"/>
             <a:r>
-              <a:rPr lang="en-US" sz="4400" b="1" i="0" dirty="0"/>
+              <a:rPr lang="en-US" sz="4400" b="0" i="0" u="none" dirty="0"/>
               <a:t>Stock OHLC</a:t>
             </a:r>
           </a:p>
@@ -909,7 +909,7 @@
         <p:spPr>
           <a:xfrm>
             <a:off x="457200" y="274638"/>
-            <a:ext cx="8230200" cy="1143000"/>
+            <a:ext cx="8229600" cy="1143000"/>
           </a:xfrm>
           <a:prstGeom prst="rect">
             <a:avLst/>
@@ -922,7 +922,7 @@
           <a:p>
             <a:pPr algn="l"/>
             <a:r>
-              <a:rPr lang="en-US" sz="4400" b="1" i="0" dirty="0"/>
+              <a:rPr lang="en-US" sz="4400" b="0" i="0" u="none" dirty="0"/>
               <a:t>Combo</a:t>
             </a:r>
           </a:p>
